--- a/deck/Trace_데스크크리틱.pptx
+++ b/deck/Trace_데스크크리틱.pptx
@@ -970,7 +970,7 @@
     <p:bg>
       <p:bgPr>
         <a:solidFill>
-          <a:srgbClr val="171717"/>
+          <a:srgbClr val="FAF9F7"/>
         </a:solidFill>
       </p:bgPr>
     </p:bg>
@@ -1015,7 +1015,7 @@
             <a:r>
               <a:rPr lang="en-US" sz="1200" b="1" spc="400" kern="0" dirty="0">
                 <a:solidFill>
-                  <a:srgbClr val="FFFFFF"/>
+                  <a:srgbClr val="171717"/>
                 </a:solidFill>
                 <a:latin typeface="맑은 고딕" pitchFamily="34" charset="0"/>
                 <a:ea typeface="맑은 고딕" pitchFamily="34" charset="-122"/>
@@ -1096,7 +1096,7 @@
             <a:r>
               <a:rPr lang="en-US" sz="3400" b="1" dirty="0">
                 <a:solidFill>
-                  <a:srgbClr val="FFFFFF"/>
+                  <a:srgbClr val="171717"/>
                 </a:solidFill>
                 <a:latin typeface="맑은 고딕" pitchFamily="34" charset="0"/>
                 <a:ea typeface="맑은 고딕" pitchFamily="34" charset="-122"/>
@@ -1116,7 +1116,7 @@
             <a:r>
               <a:rPr lang="en-US" sz="3400" b="1" dirty="0">
                 <a:solidFill>
-                  <a:srgbClr val="FFFFFF"/>
+                  <a:srgbClr val="171717"/>
                 </a:solidFill>
                 <a:latin typeface="맑은 고딕" pitchFamily="34" charset="0"/>
                 <a:ea typeface="맑은 고딕" pitchFamily="34" charset="-122"/>
@@ -1155,7 +1155,7 @@
             <a:r>
               <a:rPr lang="en-US" sz="1300" dirty="0">
                 <a:solidFill>
-                  <a:srgbClr val="9A948C"/>
+                  <a:srgbClr val="6F6A63"/>
                 </a:solidFill>
                 <a:latin typeface="맑은 고딕" pitchFamily="34" charset="0"/>
                 <a:ea typeface="맑은 고딕" pitchFamily="34" charset="-122"/>
@@ -1184,7 +1184,7 @@
             </a:avLst>
           </a:prstGeom>
           <a:solidFill>
-            <a:srgbClr val="262626"/>
+            <a:srgbClr val="F2F0EC"/>
           </a:solidFill>
           <a:ln/>
         </p:spPr>
@@ -1255,7 +1255,7 @@
             <a:r>
               <a:rPr lang="en-US" sz="1200" b="1" dirty="0">
                 <a:solidFill>
-                  <a:srgbClr val="FFFFFF"/>
+                  <a:srgbClr val="171717"/>
                 </a:solidFill>
                 <a:latin typeface="맑은 고딕" pitchFamily="34" charset="0"/>
                 <a:ea typeface="맑은 고딕" pitchFamily="34" charset="-122"/>
@@ -1284,7 +1284,7 @@
             </a:avLst>
           </a:prstGeom>
           <a:solidFill>
-            <a:srgbClr val="262626"/>
+            <a:srgbClr val="F2F0EC"/>
           </a:solidFill>
           <a:ln/>
         </p:spPr>
@@ -1355,7 +1355,7 @@
             <a:r>
               <a:rPr lang="en-US" sz="1200" b="1" dirty="0">
                 <a:solidFill>
-                  <a:srgbClr val="FFFFFF"/>
+                  <a:srgbClr val="171717"/>
                 </a:solidFill>
                 <a:latin typeface="맑은 고딕" pitchFamily="34" charset="0"/>
                 <a:ea typeface="맑은 고딕" pitchFamily="34" charset="-122"/>
@@ -1384,7 +1384,7 @@
             </a:avLst>
           </a:prstGeom>
           <a:solidFill>
-            <a:srgbClr val="262626"/>
+            <a:srgbClr val="F2F0EC"/>
           </a:solidFill>
           <a:ln/>
         </p:spPr>
@@ -1455,7 +1455,7 @@
             <a:r>
               <a:rPr lang="en-US" sz="1200" b="1" dirty="0">
                 <a:solidFill>
-                  <a:srgbClr val="FFFFFF"/>
+                  <a:srgbClr val="171717"/>
                 </a:solidFill>
                 <a:latin typeface="맑은 고딕" pitchFamily="34" charset="0"/>
                 <a:ea typeface="맑은 고딕" pitchFamily="34" charset="-122"/>
@@ -1484,7 +1484,7 @@
             </a:avLst>
           </a:prstGeom>
           <a:solidFill>
-            <a:srgbClr val="262626"/>
+            <a:srgbClr val="F2F0EC"/>
           </a:solidFill>
           <a:ln/>
         </p:spPr>
@@ -1555,7 +1555,7 @@
             <a:r>
               <a:rPr lang="en-US" sz="1200" b="1" dirty="0">
                 <a:solidFill>
-                  <a:srgbClr val="FFFFFF"/>
+                  <a:srgbClr val="171717"/>
                 </a:solidFill>
                 <a:latin typeface="맑은 고딕" pitchFamily="34" charset="0"/>
                 <a:ea typeface="맑은 고딕" pitchFamily="34" charset="-122"/>
@@ -1584,7 +1584,7 @@
             </a:avLst>
           </a:prstGeom>
           <a:solidFill>
-            <a:srgbClr val="262626"/>
+            <a:srgbClr val="F2F0EC"/>
           </a:solidFill>
           <a:ln/>
         </p:spPr>
@@ -1655,7 +1655,7 @@
             <a:r>
               <a:rPr lang="en-US" sz="1200" b="1" dirty="0">
                 <a:solidFill>
-                  <a:srgbClr val="FFFFFF"/>
+                  <a:srgbClr val="171717"/>
                 </a:solidFill>
                 <a:latin typeface="맑은 고딕" pitchFamily="34" charset="0"/>
                 <a:ea typeface="맑은 고딕" pitchFamily="34" charset="-122"/>
@@ -1684,7 +1684,7 @@
             </a:avLst>
           </a:prstGeom>
           <a:solidFill>
-            <a:srgbClr val="202020"/>
+            <a:srgbClr val="F2F0EC"/>
           </a:solidFill>
           <a:ln/>
         </p:spPr>
@@ -1716,7 +1716,7 @@
             <a:r>
               <a:rPr lang="en-US" sz="1350" b="1" dirty="0">
                 <a:solidFill>
-                  <a:srgbClr val="FFFFFF"/>
+                  <a:srgbClr val="171717"/>
                 </a:solidFill>
                 <a:latin typeface="맑은 고딕" pitchFamily="34" charset="0"/>
                 <a:ea typeface="맑은 고딕" pitchFamily="34" charset="-122"/>
@@ -1755,7 +1755,7 @@
             <a:r>
               <a:rPr lang="en-US" sz="1050" dirty="0">
                 <a:solidFill>
-                  <a:srgbClr val="9A948C"/>
+                  <a:srgbClr val="6F6A63"/>
                 </a:solidFill>
                 <a:latin typeface="맑은 고딕" pitchFamily="34" charset="0"/>
                 <a:ea typeface="맑은 고딕" pitchFamily="34" charset="-122"/>
@@ -1782,7 +1782,7 @@
             <a:avLst/>
           </a:prstGeom>
           <a:solidFill>
-            <a:srgbClr val="3A3A3A"/>
+            <a:srgbClr val="D9D5CF"/>
           </a:solidFill>
           <a:ln/>
         </p:spPr>
@@ -1802,7 +1802,7 @@
             <a:avLst/>
           </a:prstGeom>
           <a:solidFill>
-            <a:srgbClr val="E8E4DE"/>
+            <a:srgbClr val="171717"/>
           </a:solidFill>
           <a:ln/>
         </p:spPr>
@@ -1822,7 +1822,7 @@
             <a:avLst/>
           </a:prstGeom>
           <a:solidFill>
-            <a:srgbClr val="E8E4DE"/>
+            <a:srgbClr val="171717"/>
           </a:solidFill>
           <a:ln/>
         </p:spPr>
@@ -1842,7 +1842,7 @@
             <a:avLst/>
           </a:prstGeom>
           <a:solidFill>
-            <a:srgbClr val="8C8780"/>
+            <a:srgbClr val="BFBAB2"/>
           </a:solidFill>
           <a:ln/>
         </p:spPr>
@@ -1862,7 +1862,7 @@
             <a:avLst/>
           </a:prstGeom>
           <a:solidFill>
-            <a:srgbClr val="E8E4DE"/>
+            <a:srgbClr val="171717"/>
           </a:solidFill>
           <a:ln/>
         </p:spPr>
@@ -1882,7 +1882,7 @@
             <a:avLst/>
           </a:prstGeom>
           <a:solidFill>
-            <a:srgbClr val="E8E4DE"/>
+            <a:srgbClr val="171717"/>
           </a:solidFill>
           <a:ln/>
         </p:spPr>
@@ -1902,7 +1902,7 @@
             <a:avLst/>
           </a:prstGeom>
           <a:solidFill>
-            <a:srgbClr val="E8E4DE"/>
+            <a:srgbClr val="171717"/>
           </a:solidFill>
           <a:ln/>
         </p:spPr>
@@ -1922,7 +1922,7 @@
             <a:avLst/>
           </a:prstGeom>
           <a:solidFill>
-            <a:srgbClr val="8C8780"/>
+            <a:srgbClr val="BFBAB2"/>
           </a:solidFill>
           <a:ln/>
         </p:spPr>
@@ -1942,7 +1942,7 @@
             <a:avLst/>
           </a:prstGeom>
           <a:solidFill>
-            <a:srgbClr val="8C8780"/>
+            <a:srgbClr val="BFBAB2"/>
           </a:solidFill>
           <a:ln/>
         </p:spPr>
@@ -1962,7 +1962,7 @@
             <a:avLst/>
           </a:prstGeom>
           <a:solidFill>
-            <a:srgbClr val="E8E4DE"/>
+            <a:srgbClr val="171717"/>
           </a:solidFill>
           <a:ln/>
         </p:spPr>
@@ -1982,7 +1982,7 @@
             <a:avLst/>
           </a:prstGeom>
           <a:solidFill>
-            <a:srgbClr val="E8E4DE"/>
+            <a:srgbClr val="171717"/>
           </a:solidFill>
           <a:ln/>
         </p:spPr>
@@ -2002,7 +2002,7 @@
             <a:avLst/>
           </a:prstGeom>
           <a:solidFill>
-            <a:srgbClr val="8C8780"/>
+            <a:srgbClr val="BFBAB2"/>
           </a:solidFill>
           <a:ln/>
         </p:spPr>
@@ -2022,7 +2022,7 @@
             <a:avLst/>
           </a:prstGeom>
           <a:solidFill>
-            <a:srgbClr val="E8E4DE"/>
+            <a:srgbClr val="171717"/>
           </a:solidFill>
           <a:ln/>
         </p:spPr>
@@ -2042,7 +2042,7 @@
             <a:avLst/>
           </a:prstGeom>
           <a:solidFill>
-            <a:srgbClr val="E8E4DE"/>
+            <a:srgbClr val="171717"/>
           </a:solidFill>
           <a:ln/>
         </p:spPr>
@@ -2062,7 +2062,7 @@
             <a:avLst/>
           </a:prstGeom>
           <a:solidFill>
-            <a:srgbClr val="E8E4DE"/>
+            <a:srgbClr val="171717"/>
           </a:solidFill>
           <a:ln/>
         </p:spPr>
@@ -2082,7 +2082,7 @@
             <a:avLst/>
           </a:prstGeom>
           <a:solidFill>
-            <a:srgbClr val="E8E4DE"/>
+            <a:srgbClr val="171717"/>
           </a:solidFill>
           <a:ln/>
         </p:spPr>
@@ -2102,7 +2102,7 @@
             <a:avLst/>
           </a:prstGeom>
           <a:solidFill>
-            <a:srgbClr val="E8E4DE"/>
+            <a:srgbClr val="171717"/>
           </a:solidFill>
           <a:ln/>
         </p:spPr>
@@ -2122,7 +2122,7 @@
             <a:avLst/>
           </a:prstGeom>
           <a:solidFill>
-            <a:srgbClr val="8C8780"/>
+            <a:srgbClr val="BFBAB2"/>
           </a:solidFill>
           <a:ln/>
         </p:spPr>
@@ -2142,7 +2142,7 @@
             <a:avLst/>
           </a:prstGeom>
           <a:solidFill>
-            <a:srgbClr val="E8E4DE"/>
+            <a:srgbClr val="171717"/>
           </a:solidFill>
           <a:ln/>
         </p:spPr>
@@ -2162,7 +2162,7 @@
             <a:avLst/>
           </a:prstGeom>
           <a:solidFill>
-            <a:srgbClr val="E8E4DE"/>
+            <a:srgbClr val="171717"/>
           </a:solidFill>
           <a:ln/>
         </p:spPr>
@@ -2182,7 +2182,7 @@
             <a:avLst/>
           </a:prstGeom>
           <a:solidFill>
-            <a:srgbClr val="8C8780"/>
+            <a:srgbClr val="BFBAB2"/>
           </a:solidFill>
           <a:ln/>
         </p:spPr>
@@ -2202,7 +2202,7 @@
             <a:avLst/>
           </a:prstGeom>
           <a:solidFill>
-            <a:srgbClr val="8C8780"/>
+            <a:srgbClr val="BFBAB2"/>
           </a:solidFill>
           <a:ln/>
         </p:spPr>
@@ -2222,7 +2222,7 @@
             <a:avLst/>
           </a:prstGeom>
           <a:solidFill>
-            <a:srgbClr val="8C8780"/>
+            <a:srgbClr val="BFBAB2"/>
           </a:solidFill>
           <a:ln/>
         </p:spPr>
@@ -2242,7 +2242,7 @@
             <a:avLst/>
           </a:prstGeom>
           <a:solidFill>
-            <a:srgbClr val="8C8780"/>
+            <a:srgbClr val="BFBAB2"/>
           </a:solidFill>
           <a:ln/>
         </p:spPr>
@@ -2262,7 +2262,7 @@
             <a:avLst/>
           </a:prstGeom>
           <a:solidFill>
-            <a:srgbClr val="E8E4DE"/>
+            <a:srgbClr val="171717"/>
           </a:solidFill>
           <a:ln/>
         </p:spPr>
@@ -2282,7 +2282,7 @@
             <a:avLst/>
           </a:prstGeom>
           <a:solidFill>
-            <a:srgbClr val="8C8780"/>
+            <a:srgbClr val="BFBAB2"/>
           </a:solidFill>
           <a:ln/>
         </p:spPr>
@@ -2302,7 +2302,7 @@
             <a:avLst/>
           </a:prstGeom>
           <a:solidFill>
-            <a:srgbClr val="8C8780"/>
+            <a:srgbClr val="BFBAB2"/>
           </a:solidFill>
           <a:ln/>
         </p:spPr>
@@ -2322,7 +2322,7 @@
             <a:avLst/>
           </a:prstGeom>
           <a:solidFill>
-            <a:srgbClr val="E8E4DE"/>
+            <a:srgbClr val="171717"/>
           </a:solidFill>
           <a:ln/>
         </p:spPr>
@@ -2342,7 +2342,7 @@
             <a:avLst/>
           </a:prstGeom>
           <a:solidFill>
-            <a:srgbClr val="8C8780"/>
+            <a:srgbClr val="BFBAB2"/>
           </a:solidFill>
           <a:ln/>
         </p:spPr>
@@ -2362,7 +2362,7 @@
             <a:avLst/>
           </a:prstGeom>
           <a:solidFill>
-            <a:srgbClr val="8C8780"/>
+            <a:srgbClr val="BFBAB2"/>
           </a:solidFill>
           <a:ln/>
         </p:spPr>
@@ -2382,7 +2382,7 @@
             <a:avLst/>
           </a:prstGeom>
           <a:solidFill>
-            <a:srgbClr val="E8E4DE"/>
+            <a:srgbClr val="171717"/>
           </a:solidFill>
           <a:ln/>
         </p:spPr>
@@ -2402,7 +2402,7 @@
             <a:avLst/>
           </a:prstGeom>
           <a:solidFill>
-            <a:srgbClr val="8C8780"/>
+            <a:srgbClr val="BFBAB2"/>
           </a:solidFill>
           <a:ln/>
         </p:spPr>
@@ -2422,7 +2422,7 @@
             <a:avLst/>
           </a:prstGeom>
           <a:solidFill>
-            <a:srgbClr val="8C8780"/>
+            <a:srgbClr val="BFBAB2"/>
           </a:solidFill>
           <a:ln/>
         </p:spPr>
@@ -2442,7 +2442,7 @@
             <a:avLst/>
           </a:prstGeom>
           <a:solidFill>
-            <a:srgbClr val="E8E4DE"/>
+            <a:srgbClr val="171717"/>
           </a:solidFill>
           <a:ln/>
         </p:spPr>
@@ -2462,7 +2462,7 @@
             <a:avLst/>
           </a:prstGeom>
           <a:solidFill>
-            <a:srgbClr val="8C8780"/>
+            <a:srgbClr val="BFBAB2"/>
           </a:solidFill>
           <a:ln/>
         </p:spPr>
@@ -2482,7 +2482,7 @@
             <a:avLst/>
           </a:prstGeom>
           <a:solidFill>
-            <a:srgbClr val="8C8780"/>
+            <a:srgbClr val="BFBAB2"/>
           </a:solidFill>
           <a:ln/>
         </p:spPr>
@@ -2502,7 +2502,7 @@
             <a:avLst/>
           </a:prstGeom>
           <a:solidFill>
-            <a:srgbClr val="E8E4DE"/>
+            <a:srgbClr val="171717"/>
           </a:solidFill>
           <a:ln/>
         </p:spPr>
@@ -2522,7 +2522,7 @@
             <a:avLst/>
           </a:prstGeom>
           <a:solidFill>
-            <a:srgbClr val="8C8780"/>
+            <a:srgbClr val="BFBAB2"/>
           </a:solidFill>
           <a:ln/>
         </p:spPr>
@@ -2542,7 +2542,7 @@
             <a:avLst/>
           </a:prstGeom>
           <a:solidFill>
-            <a:srgbClr val="8C8780"/>
+            <a:srgbClr val="BFBAB2"/>
           </a:solidFill>
           <a:ln/>
         </p:spPr>
@@ -2562,7 +2562,7 @@
             <a:avLst/>
           </a:prstGeom>
           <a:solidFill>
-            <a:srgbClr val="E8E4DE"/>
+            <a:srgbClr val="171717"/>
           </a:solidFill>
           <a:ln/>
         </p:spPr>
@@ -2582,7 +2582,7 @@
             <a:avLst/>
           </a:prstGeom>
           <a:solidFill>
-            <a:srgbClr val="E8E4DE"/>
+            <a:srgbClr val="171717"/>
           </a:solidFill>
           <a:ln/>
         </p:spPr>
@@ -2602,7 +2602,7 @@
             <a:avLst/>
           </a:prstGeom>
           <a:solidFill>
-            <a:srgbClr val="E8E4DE"/>
+            <a:srgbClr val="171717"/>
           </a:solidFill>
           <a:ln/>
         </p:spPr>
@@ -2622,7 +2622,7 @@
             <a:avLst/>
           </a:prstGeom>
           <a:solidFill>
-            <a:srgbClr val="E8E4DE"/>
+            <a:srgbClr val="171717"/>
           </a:solidFill>
           <a:ln/>
         </p:spPr>
@@ -2642,7 +2642,7 @@
             <a:avLst/>
           </a:prstGeom>
           <a:solidFill>
-            <a:srgbClr val="8C8780"/>
+            <a:srgbClr val="BFBAB2"/>
           </a:solidFill>
           <a:ln/>
         </p:spPr>
@@ -2703,7 +2703,7 @@
             </a:avLst>
           </a:prstGeom>
           <a:solidFill>
-            <a:srgbClr val="202020"/>
+            <a:srgbClr val="F2F0EC"/>
           </a:solidFill>
           <a:ln/>
         </p:spPr>
@@ -2735,7 +2735,7 @@
             <a:r>
               <a:rPr lang="en-US" sz="1350" b="1" dirty="0">
                 <a:solidFill>
-                  <a:srgbClr val="FFFFFF"/>
+                  <a:srgbClr val="171717"/>
                 </a:solidFill>
                 <a:latin typeface="맑은 고딕" pitchFamily="34" charset="0"/>
                 <a:ea typeface="맑은 고딕" pitchFamily="34" charset="-122"/>
@@ -2774,7 +2774,7 @@
             <a:r>
               <a:rPr lang="en-US" sz="1050" dirty="0">
                 <a:solidFill>
-                  <a:srgbClr val="9A948C"/>
+                  <a:srgbClr val="6F6A63"/>
                 </a:solidFill>
                 <a:latin typeface="맑은 고딕" pitchFamily="34" charset="0"/>
                 <a:ea typeface="맑은 고딕" pitchFamily="34" charset="-122"/>
@@ -2801,7 +2801,7 @@
             <a:avLst/>
           </a:prstGeom>
           <a:solidFill>
-            <a:srgbClr val="3A3A3A"/>
+            <a:srgbClr val="D9D5CF"/>
           </a:solidFill>
           <a:ln/>
         </p:spPr>
@@ -2821,7 +2821,7 @@
             <a:avLst/>
           </a:prstGeom>
           <a:solidFill>
-            <a:srgbClr val="E8E4DE"/>
+            <a:srgbClr val="171717"/>
           </a:solidFill>
           <a:ln/>
         </p:spPr>
@@ -2861,7 +2861,7 @@
             <a:avLst/>
           </a:prstGeom>
           <a:solidFill>
-            <a:srgbClr val="E8E4DE"/>
+            <a:srgbClr val="171717"/>
           </a:solidFill>
           <a:ln/>
         </p:spPr>
@@ -2881,7 +2881,7 @@
             <a:avLst/>
           </a:prstGeom>
           <a:solidFill>
-            <a:srgbClr val="8C8780"/>
+            <a:srgbClr val="BFBAB2"/>
           </a:solidFill>
           <a:ln/>
         </p:spPr>
@@ -2901,7 +2901,7 @@
             <a:avLst/>
           </a:prstGeom>
           <a:solidFill>
-            <a:srgbClr val="E8E4DE"/>
+            <a:srgbClr val="171717"/>
           </a:solidFill>
           <a:ln/>
         </p:spPr>
@@ -2921,7 +2921,7 @@
             <a:avLst/>
           </a:prstGeom>
           <a:solidFill>
-            <a:srgbClr val="E8E4DE"/>
+            <a:srgbClr val="171717"/>
           </a:solidFill>
           <a:ln/>
         </p:spPr>
@@ -2941,7 +2941,7 @@
             <a:avLst/>
           </a:prstGeom>
           <a:solidFill>
-            <a:srgbClr val="E8E4DE"/>
+            <a:srgbClr val="171717"/>
           </a:solidFill>
           <a:ln/>
         </p:spPr>
@@ -2961,7 +2961,7 @@
             <a:avLst/>
           </a:prstGeom>
           <a:solidFill>
-            <a:srgbClr val="E8E4DE"/>
+            <a:srgbClr val="171717"/>
           </a:solidFill>
           <a:ln/>
         </p:spPr>
@@ -2981,7 +2981,7 @@
             <a:avLst/>
           </a:prstGeom>
           <a:solidFill>
-            <a:srgbClr val="E8E4DE"/>
+            <a:srgbClr val="171717"/>
           </a:solidFill>
           <a:ln/>
         </p:spPr>
@@ -3001,7 +3001,7 @@
             <a:avLst/>
           </a:prstGeom>
           <a:solidFill>
-            <a:srgbClr val="E8E4DE"/>
+            <a:srgbClr val="171717"/>
           </a:solidFill>
           <a:ln/>
         </p:spPr>
@@ -3072,7 +3072,7 @@
             <a:r>
               <a:rPr lang="en-US" sz="1150" dirty="0">
                 <a:solidFill>
-                  <a:srgbClr val="9A948C"/>
+                  <a:srgbClr val="6F6A63"/>
                 </a:solidFill>
                 <a:latin typeface="맑은 고딕" pitchFamily="34" charset="0"/>
                 <a:ea typeface="맑은 고딕" pitchFamily="34" charset="-122"/>
@@ -3100,7 +3100,7 @@
             <a:r>
               <a:rPr lang="en-US" sz="1150" dirty="0">
                 <a:solidFill>
-                  <a:srgbClr val="9A948C"/>
+                  <a:srgbClr val="6F6A63"/>
                 </a:solidFill>
                 <a:latin typeface="맑은 고딕" pitchFamily="34" charset="0"/>
                 <a:ea typeface="맑은 고딕" pitchFamily="34" charset="-122"/>
@@ -3139,7 +3139,7 @@
             <a:r>
               <a:rPr lang="en-US" sz="1200" b="1" dirty="0">
                 <a:solidFill>
-                  <a:srgbClr val="7FC49A"/>
+                  <a:srgbClr val="2C6E49"/>
                 </a:solidFill>
                 <a:latin typeface="맑은 고딕" pitchFamily="34" charset="0"/>
                 <a:ea typeface="맑은 고딕" pitchFamily="34" charset="-122"/>
@@ -3153,7 +3153,7 @@
             <a:r>
               <a:rPr lang="en-US" sz="1200" dirty="0">
                 <a:solidFill>
-                  <a:srgbClr val="FFFFFF"/>
+                  <a:srgbClr val="171717"/>
                 </a:solidFill>
                 <a:latin typeface="맑은 고딕" pitchFamily="34" charset="0"/>
                 <a:ea typeface="맑은 고딕" pitchFamily="34" charset="-122"/>
@@ -3181,7 +3181,7 @@
             <a:r>
               <a:rPr lang="en-US" sz="1200" dirty="0">
                 <a:solidFill>
-                  <a:srgbClr val="9A948C"/>
+                  <a:srgbClr val="6F6A63"/>
                 </a:solidFill>
                 <a:latin typeface="맑은 고딕" pitchFamily="34" charset="0"/>
                 <a:ea typeface="맑은 고딕" pitchFamily="34" charset="-122"/>
